--- a/jira/flow-audit trail.pptx
+++ b/jira/flow-audit trail.pptx
@@ -107,6 +107,11 @@
       </a:defRPr>
     </a:lvl9pPr>
   </p:defaultTextStyle>
+  <p:extLst>
+    <p:ext uri="{EFAFB233-063F-42B5-8137-9DF3F51BA10A}">
+      <p15:sldGuideLst xmlns:p15="http://schemas.microsoft.com/office/powerpoint/2012/main"/>
+    </p:ext>
+  </p:extLst>
 </p:presentation>
 </file>
 
@@ -263,6 +268,13 @@
           </p:nvPr>
         </p:nvSpPr>
         <p:spPr/>
+        <p:txBody>
+          <a:bodyPr/>
+          <a:lstStyle/>
+          <a:p>
+            <a:endParaRPr lang="en-US"/>
+          </a:p>
+        </p:txBody>
       </p:sp>
       <p:sp>
         <p:nvSpPr>
@@ -768,7 +780,7 @@
               </a:defRPr>
             </a:pPr>
             <a:r>
-              <a:rPr lang="en-US" sz="2800" b="1" dirty="0">
+              <a:rPr lang="en-US" sz="2800" b="1" noProof="0" dirty="0">
                 <a:solidFill>
                   <a:srgbClr val="15B8D4"/>
                 </a:solidFill>
@@ -778,14 +790,6 @@
               </a:rPr>
               <a:t>EXPERIMENT AUDIT TRAILS</a:t>
             </a:r>
-            <a:endParaRPr sz="2800" b="1" dirty="0">
-              <a:solidFill>
-                <a:srgbClr val="15B8D4"/>
-              </a:solidFill>
-              <a:latin typeface="Aptos"/>
-              <a:ea typeface="Aptos"/>
-              <a:cs typeface="Aptos"/>
-            </a:endParaRPr>
           </a:p>
         </p:txBody>
       </p:sp>
@@ -825,7 +829,7 @@
           <a:bodyPr/>
           <a:lstStyle/>
           <a:p>
-            <a:endParaRPr lang="en-BE"/>
+            <a:endParaRPr lang="en-US" noProof="0" dirty="0"/>
           </a:p>
         </p:txBody>
       </p:sp>
@@ -874,7 +878,7 @@
               </a:defRPr>
             </a:pPr>
             <a:r>
-              <a:rPr sz="1050" b="1">
+              <a:rPr lang="en-US" sz="1050" b="1" noProof="0" dirty="0">
                 <a:solidFill>
                   <a:srgbClr val="6B747C"/>
                 </a:solidFill>
@@ -936,7 +940,7 @@
               </a:defRPr>
             </a:pPr>
             <a:r>
-              <a:rPr sz="2100" b="1">
+              <a:rPr lang="en-US" sz="2100" b="1" noProof="0" dirty="0">
                 <a:solidFill>
                   <a:srgbClr val="FFFFFF"/>
                 </a:solidFill>
@@ -994,7 +998,7 @@
               </a:defRPr>
             </a:pPr>
             <a:r>
-              <a:rPr sz="1500" b="1">
+              <a:rPr lang="en-US" sz="1500" b="1" noProof="0" dirty="0">
                 <a:solidFill>
                   <a:srgbClr val="22272B"/>
                 </a:solidFill>
@@ -1052,7 +1056,7 @@
               </a:defRPr>
             </a:pPr>
             <a:r>
-              <a:rPr sz="1050" b="1">
+              <a:rPr lang="en-US" sz="1050" b="1" noProof="0" dirty="0">
                 <a:solidFill>
                   <a:srgbClr val="6B747C"/>
                 </a:solidFill>
@@ -1114,7 +1118,7 @@
               </a:defRPr>
             </a:pPr>
             <a:r>
-              <a:rPr sz="2100" b="1" dirty="0">
+              <a:rPr lang="en-US" sz="2100" b="1" noProof="0" dirty="0">
                 <a:solidFill>
                   <a:srgbClr val="22272B"/>
                 </a:solidFill>
@@ -1172,7 +1176,7 @@
               </a:defRPr>
             </a:pPr>
             <a:r>
-              <a:rPr lang="en-US" sz="1500" b="1" dirty="0">
+              <a:rPr lang="en-US" sz="1500" b="1" noProof="0" dirty="0">
                 <a:solidFill>
                   <a:srgbClr val="22272B"/>
                 </a:solidFill>
@@ -1180,18 +1184,7 @@
                 <a:ea typeface="Aptos"/>
                 <a:cs typeface="Aptos"/>
               </a:rPr>
-              <a:t>Story</a:t>
-            </a:r>
-            <a:r>
-              <a:rPr sz="1500" b="1" dirty="0">
-                <a:solidFill>
-                  <a:srgbClr val="22272B"/>
-                </a:solidFill>
-                <a:latin typeface="Aptos"/>
-                <a:ea typeface="Aptos"/>
-                <a:cs typeface="Aptos"/>
-              </a:rPr>
-              <a:t> 2255</a:t>
+              <a:t>Story 2255</a:t>
             </a:r>
           </a:p>
         </p:txBody>
@@ -1241,7 +1234,7 @@
               </a:defRPr>
             </a:pPr>
             <a:r>
-              <a:rPr sz="1350">
+              <a:rPr lang="en-US" sz="1350" noProof="0" dirty="0">
                 <a:solidFill>
                   <a:srgbClr val="6B747C"/>
                 </a:solidFill>
@@ -1299,7 +1292,7 @@
               </a:defRPr>
             </a:pPr>
             <a:r>
-              <a:rPr sz="1050" b="1">
+              <a:rPr lang="en-US" sz="1050" b="1" noProof="0" dirty="0">
                 <a:solidFill>
                   <a:srgbClr val="6B747C"/>
                 </a:solidFill>
@@ -1361,7 +1354,7 @@
               </a:defRPr>
             </a:pPr>
             <a:r>
-              <a:rPr sz="2100" b="1">
+              <a:rPr lang="en-US" sz="2100" b="1" noProof="0" dirty="0">
                 <a:solidFill>
                   <a:srgbClr val="22272B"/>
                 </a:solidFill>
@@ -1419,7 +1412,7 @@
               </a:defRPr>
             </a:pPr>
             <a:r>
-              <a:rPr lang="en-US" sz="1500" b="1" dirty="0">
+              <a:rPr lang="en-US" sz="1500" b="1" noProof="0" dirty="0">
                 <a:solidFill>
                   <a:srgbClr val="22272B"/>
                 </a:solidFill>
@@ -1427,18 +1420,7 @@
                 <a:ea typeface="Aptos"/>
                 <a:cs typeface="Aptos"/>
               </a:rPr>
-              <a:t>Story</a:t>
-            </a:r>
-            <a:r>
-              <a:rPr sz="1500" b="1" dirty="0">
-                <a:solidFill>
-                  <a:srgbClr val="22272B"/>
-                </a:solidFill>
-                <a:latin typeface="Aptos"/>
-                <a:ea typeface="Aptos"/>
-                <a:cs typeface="Aptos"/>
-              </a:rPr>
-              <a:t> 4462</a:t>
+              <a:t>Story 4462</a:t>
             </a:r>
           </a:p>
         </p:txBody>
@@ -1488,7 +1470,7 @@
               </a:defRPr>
             </a:pPr>
             <a:r>
-              <a:rPr sz="1350">
+              <a:rPr lang="en-US" sz="1350" noProof="0" dirty="0">
                 <a:solidFill>
                   <a:srgbClr val="6B747C"/>
                 </a:solidFill>
@@ -1546,7 +1528,7 @@
               </a:defRPr>
             </a:pPr>
             <a:r>
-              <a:rPr sz="1050" b="1">
+              <a:rPr lang="en-US" sz="1050" b="1" noProof="0" dirty="0">
                 <a:solidFill>
                   <a:srgbClr val="6B747C"/>
                 </a:solidFill>
@@ -1604,7 +1586,7 @@
               </a:defRPr>
             </a:pPr>
             <a:r>
-              <a:rPr lang="en-US" sz="1500" b="1" dirty="0">
+              <a:rPr lang="en-US" sz="1500" b="1" noProof="0" dirty="0">
                 <a:solidFill>
                   <a:srgbClr val="22272B"/>
                 </a:solidFill>
@@ -1612,18 +1594,7 @@
                 <a:ea typeface="Aptos"/>
                 <a:cs typeface="Aptos"/>
               </a:rPr>
-              <a:t>Story</a:t>
-            </a:r>
-            <a:r>
-              <a:rPr sz="1500" b="1" dirty="0">
-                <a:solidFill>
-                  <a:srgbClr val="22272B"/>
-                </a:solidFill>
-                <a:latin typeface="Aptos"/>
-                <a:ea typeface="Aptos"/>
-                <a:cs typeface="Aptos"/>
-              </a:rPr>
-              <a:t> 4463</a:t>
+              <a:t>Story 4463</a:t>
             </a:r>
           </a:p>
         </p:txBody>
@@ -1673,7 +1644,7 @@
               </a:defRPr>
             </a:pPr>
             <a:r>
-              <a:rPr sz="1200">
+              <a:rPr lang="en-US" sz="1200" noProof="0" dirty="0">
                 <a:solidFill>
                   <a:srgbClr val="6B747C"/>
                 </a:solidFill>
@@ -1800,7 +1771,7 @@
           <a:bodyPr/>
           <a:lstStyle/>
           <a:p>
-            <a:endParaRPr lang="en-BE"/>
+            <a:endParaRPr lang="en-US" noProof="0" dirty="0"/>
           </a:p>
         </p:txBody>
       </p:sp>
@@ -1849,7 +1820,7 @@
               </a:defRPr>
             </a:pPr>
             <a:r>
-              <a:rPr sz="1050" b="1">
+              <a:rPr lang="en-US" sz="1050" b="1" noProof="0" dirty="0">
                 <a:solidFill>
                   <a:srgbClr val="6B747C"/>
                 </a:solidFill>
@@ -1911,7 +1882,7 @@
               </a:defRPr>
             </a:pPr>
             <a:r>
-              <a:rPr lang="en-US" sz="2100" b="1" dirty="0">
+              <a:rPr lang="en-US" sz="2100" b="1" noProof="0" dirty="0">
                 <a:solidFill>
                   <a:srgbClr val="FFFFFF"/>
                 </a:solidFill>
@@ -1919,16 +1890,8 @@
                 <a:ea typeface="Aptos Display"/>
                 <a:cs typeface="Aptos Display"/>
               </a:rPr>
-              <a:t>?</a:t>
-            </a:r>
-            <a:endParaRPr sz="2100" b="1" dirty="0">
-              <a:solidFill>
-                <a:srgbClr val="FFFFFF"/>
-              </a:solidFill>
-              <a:latin typeface="Aptos Display"/>
-              <a:ea typeface="Aptos Display"/>
-              <a:cs typeface="Aptos Display"/>
-            </a:endParaRPr>
+              <a:t>4541</a:t>
+            </a:r>
           </a:p>
         </p:txBody>
       </p:sp>
@@ -1977,7 +1940,7 @@
               </a:defRPr>
             </a:pPr>
             <a:r>
-              <a:rPr sz="1500" b="1" dirty="0">
+              <a:rPr lang="en-US" sz="1500" b="1" noProof="0" dirty="0">
                 <a:solidFill>
                   <a:srgbClr val="22272B"/>
                 </a:solidFill>
@@ -1985,27 +1948,8 @@
                 <a:ea typeface="Aptos"/>
                 <a:cs typeface="Aptos"/>
               </a:rPr>
-              <a:t>Task </a:t>
-            </a:r>
-            <a:r>
-              <a:rPr lang="en-US" sz="1500" b="1" dirty="0">
-                <a:solidFill>
-                  <a:srgbClr val="22272B"/>
-                </a:solidFill>
-                <a:latin typeface="Aptos"/>
-                <a:ea typeface="Aptos"/>
-                <a:cs typeface="Aptos"/>
-              </a:rPr>
-              <a:t>?</a:t>
-            </a:r>
-            <a:endParaRPr sz="1500" b="1" dirty="0">
-              <a:solidFill>
-                <a:srgbClr val="22272B"/>
-              </a:solidFill>
-              <a:latin typeface="Aptos"/>
-              <a:ea typeface="Aptos"/>
-              <a:cs typeface="Aptos"/>
-            </a:endParaRPr>
+              <a:t>Task 4541</a:t>
+            </a:r>
           </a:p>
         </p:txBody>
       </p:sp>
@@ -2054,7 +1998,7 @@
               </a:defRPr>
             </a:pPr>
             <a:r>
-              <a:rPr sz="1050" b="1">
+              <a:rPr lang="en-US" sz="1050" b="1" noProof="0" dirty="0">
                 <a:solidFill>
                   <a:srgbClr val="6B747C"/>
                 </a:solidFill>
@@ -2116,7 +2060,7 @@
               </a:defRPr>
             </a:pPr>
             <a:r>
-              <a:rPr lang="en-US" sz="2100" b="1" dirty="0">
+              <a:rPr lang="en-US" sz="2100" b="1" noProof="0" dirty="0">
                 <a:solidFill>
                   <a:srgbClr val="22272B"/>
                 </a:solidFill>
@@ -2126,14 +2070,6 @@
               </a:rPr>
               <a:t>2276</a:t>
             </a:r>
-            <a:endParaRPr sz="2100" b="1" dirty="0">
-              <a:solidFill>
-                <a:srgbClr val="22272B"/>
-              </a:solidFill>
-              <a:latin typeface="Aptos Display"/>
-              <a:ea typeface="Aptos Display"/>
-              <a:cs typeface="Aptos Display"/>
-            </a:endParaRPr>
           </a:p>
         </p:txBody>
       </p:sp>
@@ -2182,7 +2118,7 @@
               </a:defRPr>
             </a:pPr>
             <a:r>
-              <a:rPr lang="en-US" sz="1500" b="1" dirty="0">
+              <a:rPr lang="en-US" sz="1500" b="1" noProof="0" dirty="0">
                 <a:solidFill>
                   <a:srgbClr val="22272B"/>
                 </a:solidFill>
@@ -2190,38 +2126,8 @@
                 <a:ea typeface="Aptos"/>
                 <a:cs typeface="Aptos"/>
               </a:rPr>
-              <a:t>Story</a:t>
-            </a:r>
-            <a:r>
-              <a:rPr sz="1500" b="1" dirty="0">
-                <a:solidFill>
-                  <a:srgbClr val="22272B"/>
-                </a:solidFill>
-                <a:latin typeface="Aptos"/>
-                <a:ea typeface="Aptos"/>
-                <a:cs typeface="Aptos"/>
-              </a:rPr>
-              <a:t> </a:t>
-            </a:r>
-            <a:r>
-              <a:rPr lang="en-US" sz="1500" b="1" dirty="0">
-                <a:solidFill>
-                  <a:srgbClr val="22272B"/>
-                </a:solidFill>
-                <a:latin typeface="Aptos"/>
-                <a:ea typeface="Aptos"/>
-                <a:cs typeface="Aptos"/>
-              </a:rPr>
-              <a:t>2276</a:t>
-            </a:r>
-            <a:endParaRPr sz="1500" b="1" dirty="0">
-              <a:solidFill>
-                <a:srgbClr val="22272B"/>
-              </a:solidFill>
-              <a:latin typeface="Aptos"/>
-              <a:ea typeface="Aptos"/>
-              <a:cs typeface="Aptos"/>
-            </a:endParaRPr>
+              <a:t>Story 2276</a:t>
+            </a:r>
           </a:p>
         </p:txBody>
       </p:sp>
@@ -2270,7 +2176,7 @@
               </a:defRPr>
             </a:pPr>
             <a:r>
-              <a:rPr sz="1350">
+              <a:rPr lang="en-US" sz="1350" noProof="0" dirty="0">
                 <a:solidFill>
                   <a:srgbClr val="6B747C"/>
                 </a:solidFill>
@@ -2328,7 +2234,7 @@
               </a:defRPr>
             </a:pPr>
             <a:r>
-              <a:rPr sz="1050" b="1">
+              <a:rPr lang="en-US" sz="1050" b="1" noProof="0" dirty="0">
                 <a:solidFill>
                   <a:srgbClr val="6B747C"/>
                 </a:solidFill>
@@ -2390,7 +2296,7 @@
               </a:defRPr>
             </a:pPr>
             <a:r>
-              <a:rPr lang="en-US" sz="2100" b="1" dirty="0">
+              <a:rPr lang="en-US" sz="2100" b="1" noProof="0" dirty="0">
                 <a:solidFill>
                   <a:srgbClr val="22272B"/>
                 </a:solidFill>
@@ -2400,14 +2306,6 @@
               </a:rPr>
               <a:t>4525</a:t>
             </a:r>
-            <a:endParaRPr sz="2100" b="1" dirty="0">
-              <a:solidFill>
-                <a:srgbClr val="22272B"/>
-              </a:solidFill>
-              <a:latin typeface="Aptos Display"/>
-              <a:ea typeface="Aptos Display"/>
-              <a:cs typeface="Aptos Display"/>
-            </a:endParaRPr>
           </a:p>
         </p:txBody>
       </p:sp>
@@ -2456,7 +2354,7 @@
               </a:defRPr>
             </a:pPr>
             <a:r>
-              <a:rPr lang="en-US" sz="1500" b="1" dirty="0">
+              <a:rPr lang="en-US" sz="1500" b="1" noProof="0" dirty="0">
                 <a:solidFill>
                   <a:srgbClr val="22272B"/>
                 </a:solidFill>
@@ -2464,38 +2362,8 @@
                 <a:ea typeface="Aptos"/>
                 <a:cs typeface="Aptos"/>
               </a:rPr>
-              <a:t>Story</a:t>
-            </a:r>
-            <a:r>
-              <a:rPr sz="1500" b="1" dirty="0">
-                <a:solidFill>
-                  <a:srgbClr val="22272B"/>
-                </a:solidFill>
-                <a:latin typeface="Aptos"/>
-                <a:ea typeface="Aptos"/>
-                <a:cs typeface="Aptos"/>
-              </a:rPr>
-              <a:t> </a:t>
-            </a:r>
-            <a:r>
-              <a:rPr lang="en-US" sz="1500" b="1" dirty="0">
-                <a:solidFill>
-                  <a:srgbClr val="22272B"/>
-                </a:solidFill>
-                <a:latin typeface="Aptos"/>
-                <a:ea typeface="Aptos"/>
-                <a:cs typeface="Aptos"/>
-              </a:rPr>
-              <a:t>4525</a:t>
-            </a:r>
-            <a:endParaRPr sz="1500" b="1" dirty="0">
-              <a:solidFill>
-                <a:srgbClr val="22272B"/>
-              </a:solidFill>
-              <a:latin typeface="Aptos"/>
-              <a:ea typeface="Aptos"/>
-              <a:cs typeface="Aptos"/>
-            </a:endParaRPr>
+              <a:t>Story 4525</a:t>
+            </a:r>
           </a:p>
         </p:txBody>
       </p:sp>
@@ -2544,7 +2412,7 @@
               </a:defRPr>
             </a:pPr>
             <a:r>
-              <a:rPr sz="1350">
+              <a:rPr lang="en-US" sz="1350" noProof="0" dirty="0">
                 <a:solidFill>
                   <a:srgbClr val="6B747C"/>
                 </a:solidFill>
@@ -2602,7 +2470,7 @@
               </a:defRPr>
             </a:pPr>
             <a:r>
-              <a:rPr sz="1050" b="1">
+              <a:rPr lang="en-US" sz="1050" b="1" noProof="0" dirty="0">
                 <a:solidFill>
                   <a:srgbClr val="6B747C"/>
                 </a:solidFill>
@@ -2660,7 +2528,7 @@
               </a:defRPr>
             </a:pPr>
             <a:r>
-              <a:rPr lang="en-US" sz="1500" b="1" dirty="0">
+              <a:rPr lang="en-US" sz="1500" b="1" noProof="0" dirty="0">
                 <a:solidFill>
                   <a:srgbClr val="22272B"/>
                 </a:solidFill>
@@ -2668,38 +2536,8 @@
                 <a:ea typeface="Aptos"/>
                 <a:cs typeface="Aptos"/>
               </a:rPr>
-              <a:t>Story</a:t>
-            </a:r>
-            <a:r>
-              <a:rPr sz="1500" b="1" dirty="0">
-                <a:solidFill>
-                  <a:srgbClr val="22272B"/>
-                </a:solidFill>
-                <a:latin typeface="Aptos"/>
-                <a:ea typeface="Aptos"/>
-                <a:cs typeface="Aptos"/>
-              </a:rPr>
-              <a:t> </a:t>
-            </a:r>
-            <a:r>
-              <a:rPr lang="en-US" sz="1500" b="1" dirty="0">
-                <a:solidFill>
-                  <a:srgbClr val="22272B"/>
-                </a:solidFill>
-                <a:latin typeface="Aptos"/>
-                <a:ea typeface="Aptos"/>
-                <a:cs typeface="Aptos"/>
-              </a:rPr>
-              <a:t>4533</a:t>
-            </a:r>
-            <a:endParaRPr sz="1500" b="1" dirty="0">
-              <a:solidFill>
-                <a:srgbClr val="22272B"/>
-              </a:solidFill>
-              <a:latin typeface="Aptos"/>
-              <a:ea typeface="Aptos"/>
-              <a:cs typeface="Aptos"/>
-            </a:endParaRPr>
+              <a:t>Story 4533</a:t>
+            </a:r>
           </a:p>
         </p:txBody>
       </p:sp>
@@ -2748,7 +2586,7 @@
               </a:defRPr>
             </a:pPr>
             <a:r>
-              <a:rPr sz="1200">
+              <a:rPr lang="en-US" sz="1200" noProof="0" dirty="0">
                 <a:solidFill>
                   <a:srgbClr val="6B747C"/>
                 </a:solidFill>
@@ -2902,7 +2740,7 @@
               </a:defRPr>
             </a:pPr>
             <a:r>
-              <a:rPr lang="en-US" sz="2800" b="1" dirty="0">
+              <a:rPr lang="en-US" sz="2800" b="1" noProof="0" dirty="0">
                 <a:solidFill>
                   <a:srgbClr val="15B8D4"/>
                 </a:solidFill>
@@ -2912,14 +2750,6 @@
               </a:rPr>
               <a:t>SYSTEM AUDIT TRAILS</a:t>
             </a:r>
-            <a:endParaRPr sz="2800" b="1" dirty="0">
-              <a:solidFill>
-                <a:srgbClr val="15B8D4"/>
-              </a:solidFill>
-              <a:latin typeface="Aptos"/>
-              <a:ea typeface="Aptos"/>
-              <a:cs typeface="Aptos"/>
-            </a:endParaRPr>
           </a:p>
         </p:txBody>
       </p:sp>
@@ -2972,7 +2802,7 @@
               </a:defRPr>
             </a:pPr>
             <a:r>
-              <a:rPr lang="en-US" sz="2100" b="1" dirty="0">
+              <a:rPr lang="en-US" sz="2100" b="1" noProof="0" dirty="0">
                 <a:solidFill>
                   <a:srgbClr val="22272B"/>
                 </a:solidFill>
@@ -2982,14 +2812,6 @@
               </a:rPr>
               <a:t>4533</a:t>
             </a:r>
-            <a:endParaRPr sz="2100" b="1" dirty="0">
-              <a:solidFill>
-                <a:srgbClr val="22272B"/>
-              </a:solidFill>
-              <a:latin typeface="Aptos Display"/>
-              <a:ea typeface="Aptos Display"/>
-              <a:cs typeface="Aptos Display"/>
-            </a:endParaRPr>
           </a:p>
         </p:txBody>
       </p:sp>
@@ -3042,7 +2864,7 @@
               </a:defRPr>
             </a:pPr>
             <a:r>
-              <a:rPr lang="en-US" sz="2100" b="1" dirty="0">
+              <a:rPr lang="en-US" sz="2100" b="1" noProof="0" dirty="0">
                 <a:solidFill>
                   <a:srgbClr val="22272B"/>
                 </a:solidFill>
@@ -3052,14 +2874,6 @@
               </a:rPr>
               <a:t>4463</a:t>
             </a:r>
-            <a:endParaRPr sz="2100" b="1" dirty="0">
-              <a:solidFill>
-                <a:srgbClr val="22272B"/>
-              </a:solidFill>
-              <a:latin typeface="Aptos Display"/>
-              <a:ea typeface="Aptos Display"/>
-              <a:cs typeface="Aptos Display"/>
-            </a:endParaRPr>
           </a:p>
         </p:txBody>
       </p:sp>
@@ -3112,7 +2926,7 @@
               </a:defRPr>
             </a:pPr>
             <a:r>
-              <a:rPr lang="en-US" sz="2100" b="1" dirty="0">
+              <a:rPr lang="en-US" sz="2100" b="1" noProof="0" dirty="0">
                 <a:solidFill>
                   <a:srgbClr val="22272B"/>
                 </a:solidFill>
@@ -3122,14 +2936,6 @@
               </a:rPr>
               <a:t>4400</a:t>
             </a:r>
-            <a:endParaRPr sz="2100" b="1" dirty="0">
-              <a:solidFill>
-                <a:srgbClr val="22272B"/>
-              </a:solidFill>
-              <a:latin typeface="Aptos Display"/>
-              <a:ea typeface="Aptos Display"/>
-              <a:cs typeface="Aptos Display"/>
-            </a:endParaRPr>
           </a:p>
         </p:txBody>
       </p:sp>
@@ -3243,7 +3049,7 @@
               </a:defRPr>
             </a:pPr>
             <a:r>
-              <a:rPr lang="en-US" sz="1500" b="1" dirty="0">
+              <a:rPr lang="en-US" sz="1500" b="1" noProof="0" dirty="0">
                 <a:solidFill>
                   <a:srgbClr val="22272B"/>
                 </a:solidFill>
@@ -3251,38 +3057,8 @@
                 <a:ea typeface="Aptos"/>
                 <a:cs typeface="Aptos"/>
               </a:rPr>
-              <a:t>Story</a:t>
-            </a:r>
-            <a:r>
-              <a:rPr sz="1500" b="1" dirty="0">
-                <a:solidFill>
-                  <a:srgbClr val="22272B"/>
-                </a:solidFill>
-                <a:latin typeface="Aptos"/>
-                <a:ea typeface="Aptos"/>
-                <a:cs typeface="Aptos"/>
-              </a:rPr>
-              <a:t> </a:t>
-            </a:r>
-            <a:r>
-              <a:rPr lang="en-US" sz="1500" b="1" dirty="0">
-                <a:solidFill>
-                  <a:srgbClr val="22272B"/>
-                </a:solidFill>
-                <a:latin typeface="Aptos"/>
-                <a:ea typeface="Aptos"/>
-                <a:cs typeface="Aptos"/>
-              </a:rPr>
-              <a:t>4400</a:t>
-            </a:r>
-            <a:endParaRPr sz="1500" b="1" dirty="0">
-              <a:solidFill>
-                <a:srgbClr val="22272B"/>
-              </a:solidFill>
-              <a:latin typeface="Aptos"/>
-              <a:ea typeface="Aptos"/>
-              <a:cs typeface="Aptos"/>
-            </a:endParaRPr>
+              <a:t>Story 4400</a:t>
+            </a:r>
           </a:p>
         </p:txBody>
       </p:sp>
@@ -3331,7 +3107,7 @@
               </a:defRPr>
             </a:pPr>
             <a:r>
-              <a:rPr sz="1200">
+              <a:rPr lang="en-US" sz="1200" noProof="0" dirty="0">
                 <a:solidFill>
                   <a:srgbClr val="6B747C"/>
                 </a:solidFill>
@@ -3339,7 +3115,144 @@
                 <a:ea typeface="Aptos"/>
                 <a:cs typeface="Aptos"/>
               </a:rPr>
-              <a:t>custom search builder</a:t>
+              <a:t>clean up</a:t>
+            </a:r>
+            <a:br>
+              <a:rPr lang="en-US" sz="1200" noProof="0" dirty="0">
+                <a:solidFill>
+                  <a:srgbClr val="6B747C"/>
+                </a:solidFill>
+                <a:latin typeface="Aptos"/>
+                <a:ea typeface="Aptos"/>
+                <a:cs typeface="Aptos"/>
+              </a:rPr>
+            </a:br>
+            <a:r>
+              <a:rPr lang="en-US" sz="1200" noProof="0" dirty="0">
+                <a:solidFill>
+                  <a:srgbClr val="6B747C"/>
+                </a:solidFill>
+                <a:latin typeface="Aptos"/>
+                <a:ea typeface="Aptos"/>
+                <a:cs typeface="Aptos"/>
+              </a:rPr>
+              <a:t>export buttons</a:t>
+            </a:r>
+          </a:p>
+        </p:txBody>
+      </p:sp>
+      <p:sp>
+        <p:nvSpPr>
+          <p:cNvPr id="4" name="role-datatables">
+            <a:extLst>
+              <a:ext uri="{FF2B5EF4-FFF2-40B4-BE49-F238E27FC236}">
+                <a16:creationId xmlns:a16="http://schemas.microsoft.com/office/drawing/2014/main" id="{3BD0E4AB-180E-9B54-FCCF-096B0AA26844}"/>
+              </a:ext>
+            </a:extLst>
+          </p:cNvPr>
+          <p:cNvSpPr>
+            <a:spLocks noGrp="1"/>
+          </p:cNvSpPr>
+          <p:nvPr/>
+        </p:nvSpPr>
+        <p:spPr>
+          <a:xfrm>
+            <a:off x="599694" y="6100953"/>
+            <a:ext cx="1943100" cy="457200"/>
+          </a:xfrm>
+          <a:prstGeom prst="rect">
+            <a:avLst/>
+          </a:prstGeom>
+          <a:noFill/>
+          <a:ln w="0">
+            <a:noFill/>
+            <a:prstDash val="solid"/>
+          </a:ln>
+        </p:spPr>
+        <p:txBody>
+          <a:bodyPr wrap="square" lIns="0" tIns="0" rIns="0" bIns="0" anchor="t">
+            <a:normAutofit/>
+          </a:bodyPr>
+          <a:lstStyle/>
+          <a:p>
+            <a:pPr algn="ctr">
+              <a:defRPr sz="1350">
+                <a:solidFill>
+                  <a:srgbClr val="6B747C"/>
+                </a:solidFill>
+                <a:latin typeface="Aptos"/>
+                <a:ea typeface="Aptos"/>
+                <a:cs typeface="Aptos"/>
+              </a:defRPr>
+            </a:pPr>
+            <a:r>
+              <a:rPr lang="en-US" sz="1350" noProof="0" dirty="0">
+                <a:solidFill>
+                  <a:srgbClr val="6B747C"/>
+                </a:solidFill>
+                <a:latin typeface="Aptos"/>
+                <a:ea typeface="Aptos"/>
+                <a:cs typeface="Aptos"/>
+              </a:rPr>
+              <a:t>data preparation</a:t>
+            </a:r>
+          </a:p>
+        </p:txBody>
+      </p:sp>
+      <p:sp>
+        <p:nvSpPr>
+          <p:cNvPr id="23" name="role-datatables">
+            <a:extLst>
+              <a:ext uri="{FF2B5EF4-FFF2-40B4-BE49-F238E27FC236}">
+                <a16:creationId xmlns:a16="http://schemas.microsoft.com/office/drawing/2014/main" id="{6BD73FCC-F6BC-E871-39DE-81549B90DEF5}"/>
+              </a:ext>
+            </a:extLst>
+          </p:cNvPr>
+          <p:cNvSpPr>
+            <a:spLocks noGrp="1"/>
+          </p:cNvSpPr>
+          <p:nvPr/>
+        </p:nvSpPr>
+        <p:spPr>
+          <a:xfrm>
+            <a:off x="474726" y="2928747"/>
+            <a:ext cx="1943100" cy="457200"/>
+          </a:xfrm>
+          <a:prstGeom prst="rect">
+            <a:avLst/>
+          </a:prstGeom>
+          <a:noFill/>
+          <a:ln w="0">
+            <a:noFill/>
+            <a:prstDash val="solid"/>
+          </a:ln>
+        </p:spPr>
+        <p:txBody>
+          <a:bodyPr wrap="square" lIns="0" tIns="0" rIns="0" bIns="0" anchor="t">
+            <a:normAutofit/>
+          </a:bodyPr>
+          <a:lstStyle/>
+          <a:p>
+            <a:pPr algn="ctr">
+              <a:defRPr sz="1350">
+                <a:solidFill>
+                  <a:srgbClr val="6B747C"/>
+                </a:solidFill>
+                <a:latin typeface="Aptos"/>
+                <a:ea typeface="Aptos"/>
+                <a:cs typeface="Aptos"/>
+              </a:defRPr>
+            </a:pPr>
+            <a:r>
+              <a:rPr lang="en-US" sz="1350" noProof="0" dirty="0">
+                <a:solidFill>
+                  <a:srgbClr val="6B747C"/>
+                </a:solidFill>
+                <a:latin typeface="Aptos"/>
+                <a:ea typeface="Aptos"/>
+                <a:cs typeface="Aptos"/>
+              </a:rPr>
+              <a:t>data preparation</a:t>
             </a:r>
           </a:p>
         </p:txBody>
@@ -3875,6 +3788,7 @@
 
 <file path=docMetadata/LabelInfo.xml><?xml version="1.0" encoding="utf-8"?>
 <clbl:labelList xmlns:clbl="http://schemas.microsoft.com/office/2020/mipLabelMetadata">
+  <clbl:label id="{3ca48ea3-8c75-4d36-b64f-70604b11fd22}" enabled="1" method="Standard" siteId="{3ac94b33-9135-4821-9502-eafda6592a35}" contentBits="0" removed="0"/>
   <clbl:label id="{c5e6e129-f928-4a05-ae32-d838f6b21bdd}" enabled="1" method="Standard" siteId="{8b87af7d-8647-4dc7-8df4-5f69a2011bb5}" contentBits="3" removed="0"/>
 </clbl:labelList>
 </file>
--- a/jira/flow-audit trail.pptx
+++ b/jira/flow-audit trail.pptx
@@ -291,7 +291,7 @@
           <a:bodyPr/>
           <a:lstStyle/>
           <a:p>
-            <a:endParaRPr/>
+            <a:endParaRPr dirty="0"/>
           </a:p>
         </p:txBody>
       </p:sp>
@@ -914,11 +914,17 @@
             <a:avLst/>
           </a:prstGeom>
           <a:solidFill>
-            <a:srgbClr val="22272B"/>
+            <a:schemeClr val="accent1">
+              <a:lumMod val="20000"/>
+              <a:lumOff val="80000"/>
+            </a:schemeClr>
           </a:solidFill>
           <a:ln w="28575">
             <a:solidFill>
-              <a:srgbClr val="22272B"/>
+              <a:schemeClr val="accent1">
+                <a:lumMod val="60000"/>
+                <a:lumOff val="40000"/>
+              </a:schemeClr>
             </a:solidFill>
             <a:prstDash val="solid"/>
           </a:ln>
@@ -1856,11 +1862,17 @@
             <a:avLst/>
           </a:prstGeom>
           <a:solidFill>
-            <a:srgbClr val="22272B"/>
+            <a:schemeClr val="accent1">
+              <a:lumMod val="20000"/>
+              <a:lumOff val="80000"/>
+            </a:schemeClr>
           </a:solidFill>
           <a:ln w="28575">
             <a:solidFill>
-              <a:srgbClr val="22272B"/>
+              <a:schemeClr val="accent1">
+                <a:lumMod val="60000"/>
+                <a:lumOff val="40000"/>
+              </a:schemeClr>
             </a:solidFill>
             <a:prstDash val="solid"/>
           </a:ln>
